--- a/docs/reports/台灣產業趨勢監測週報_2026-09-28_2026-10-05.pptx
+++ b/docs/reports/台灣產業趨勢監測週報_2026-09-28_2026-10-05.pptx
@@ -183,37 +183,37 @@
                 <c:formatCode>General</c:formatCode>
                 <c:ptCount val="11"/>
                 <c:pt idx="0">
-                  <c:v>51</c:v>
+                  <c:v>55</c:v>
                 </c:pt>
                 <c:pt idx="1">
-                  <c:v>143</c:v>
+                  <c:v>156</c:v>
                 </c:pt>
                 <c:pt idx="2">
-                  <c:v>162</c:v>
+                  <c:v>168</c:v>
                 </c:pt>
                 <c:pt idx="3">
-                  <c:v>195</c:v>
+                  <c:v>206</c:v>
                 </c:pt>
                 <c:pt idx="4">
-                  <c:v>262</c:v>
+                  <c:v>287</c:v>
                 </c:pt>
                 <c:pt idx="5">
-                  <c:v>294</c:v>
+                  <c:v>306</c:v>
                 </c:pt>
                 <c:pt idx="6">
-                  <c:v>335</c:v>
+                  <c:v>352</c:v>
                 </c:pt>
                 <c:pt idx="7">
-                  <c:v>346</c:v>
+                  <c:v>365</c:v>
                 </c:pt>
                 <c:pt idx="8">
-                  <c:v>682</c:v>
+                  <c:v>716</c:v>
                 </c:pt>
                 <c:pt idx="9">
-                  <c:v>881</c:v>
+                  <c:v>947</c:v>
                 </c:pt>
                 <c:pt idx="10">
-                  <c:v>928</c:v>
+                  <c:v>974</c:v>
                 </c:pt>
               </c:numCache>
             </c:numRef>
@@ -335,7 +335,7 @@
                   <c:v>16</c:v>
                 </c:pt>
                 <c:pt idx="2">
-                  <c:v>10</c:v>
+                  <c:v>11</c:v>
                 </c:pt>
                 <c:pt idx="3">
                   <c:v>4</c:v>
@@ -538,22 +538,22 @@
                 <c:formatCode>General</c:formatCode>
                 <c:ptCount val="6"/>
                 <c:pt idx="0">
-                  <c:v>234</c:v>
+                  <c:v>250</c:v>
                 </c:pt>
                 <c:pt idx="1">
-                  <c:v>119</c:v>
+                  <c:v>122</c:v>
                 </c:pt>
                 <c:pt idx="2">
-                  <c:v>59</c:v>
+                  <c:v>60</c:v>
                 </c:pt>
                 <c:pt idx="3">
-                  <c:v>48</c:v>
+                  <c:v>53</c:v>
                 </c:pt>
                 <c:pt idx="4">
                   <c:v>34</c:v>
                 </c:pt>
                 <c:pt idx="5">
-                  <c:v>24</c:v>
+                  <c:v>25</c:v>
                 </c:pt>
               </c:numCache>
             </c:numRef>
@@ -3705,7 +3705,7 @@
           </a:p>
           <a:p>
             <a:r>
-              <a:t>產出:2026-10-05 14:32(台北時間)</a:t>
+              <a:t>產出:2026-10-05 19:28(台北時間)</a:t>
             </a:r>
           </a:p>
           <a:p>
@@ -3773,7 +3773,7 @@
               <a:defRPr sz="1600"/>
             </a:pPr>
             <a:r>
-              <a:t>本期共蒐集 8685 篇公開報導,可歸類 4279 篇</a:t>
+              <a:t>本期共蒐集 9143 篇公開報導,可歸類 4532 篇</a:t>
             </a:r>
           </a:p>
           <a:p>
@@ -3781,7 +3781,7 @@
               <a:defRPr sz="1600"/>
             </a:pPr>
             <a:r>
-              <a:t>政府教育單位:928 篇(佔可歸類 21.7%)</a:t>
+              <a:t>政府教育單位:974 篇(佔可歸類 21.5%)</a:t>
             </a:r>
           </a:p>
           <a:p>
@@ -3789,7 +3789,7 @@
               <a:defRPr sz="1600"/>
             </a:pPr>
             <a:r>
-              <a:t>高科技製造業:881 篇(佔可歸類 20.6%)</a:t>
+              <a:t>高科技製造業:947 篇(佔可歸類 20.9%)</a:t>
             </a:r>
           </a:p>
           <a:p>
@@ -3797,7 +3797,7 @@
               <a:defRPr sz="1600"/>
             </a:pPr>
             <a:r>
-              <a:t>金融業:682 篇(佔可歸類 15.9%)</a:t>
+              <a:t>金融業:716 篇(佔可歸類 15.8%)</a:t>
             </a:r>
           </a:p>
           <a:p>
@@ -3805,7 +3805,7 @@
               <a:defRPr sz="1600"/>
             </a:pPr>
             <a:r>
-              <a:t>最熱主題:AI 與自動化(921 篇)、利率與資金環境(329 篇)、地緣政治與供應鏈(224 篇)</a:t>
+              <a:t>最熱主題:AI 與自動化(971 篇)、利率與資金環境(339 篇)、地緣政治與供應鏈(231 篇)</a:t>
             </a:r>
           </a:p>
           <a:p>
@@ -3909,7 +3909,7 @@
           <a:lstStyle/>
           <a:p>
             <a:r>
-              <a:t>競品聲量對比(SOV)— 電腦品牌(合計 63 篇)</a:t>
+              <a:t>競品聲量對比(SOV)— 電腦品牌(合計 64 篇)</a:t>
             </a:r>
           </a:p>
         </p:txBody>
@@ -3966,7 +3966,7 @@
           <a:lstStyle/>
           <a:p>
             <a:r>
-              <a:t>競品聲量對比(SOV)— 半導體(合計 518 篇)</a:t>
+              <a:t>競品聲量對比(SOV)— 半導體(合計 544 篇)</a:t>
             </a:r>
           </a:p>
         </p:txBody>

--- a/docs/reports/台灣產業趨勢監測週報_2026-09-28_2026-10-05.pptx
+++ b/docs/reports/台灣產業趨勢監測週報_2026-09-28_2026-10-05.pptx
@@ -186,34 +186,34 @@
                   <c:v>55</c:v>
                 </c:pt>
                 <c:pt idx="1">
-                  <c:v>156</c:v>
+                  <c:v>157</c:v>
                 </c:pt>
                 <c:pt idx="2">
-                  <c:v>168</c:v>
+                  <c:v>171</c:v>
                 </c:pt>
                 <c:pt idx="3">
-                  <c:v>206</c:v>
+                  <c:v>208</c:v>
                 </c:pt>
                 <c:pt idx="4">
-                  <c:v>287</c:v>
+                  <c:v>299</c:v>
                 </c:pt>
                 <c:pt idx="5">
-                  <c:v>306</c:v>
+                  <c:v>313</c:v>
                 </c:pt>
                 <c:pt idx="6">
-                  <c:v>352</c:v>
+                  <c:v>360</c:v>
                 </c:pt>
                 <c:pt idx="7">
-                  <c:v>365</c:v>
+                  <c:v>373</c:v>
                 </c:pt>
                 <c:pt idx="8">
-                  <c:v>716</c:v>
+                  <c:v>733</c:v>
                 </c:pt>
                 <c:pt idx="9">
-                  <c:v>947</c:v>
+                  <c:v>958</c:v>
                 </c:pt>
                 <c:pt idx="10">
-                  <c:v>974</c:v>
+                  <c:v>985</c:v>
                 </c:pt>
               </c:numCache>
             </c:numRef>
@@ -538,10 +538,10 @@
                 <c:formatCode>General</c:formatCode>
                 <c:ptCount val="6"/>
                 <c:pt idx="0">
-                  <c:v>250</c:v>
+                  <c:v>253</c:v>
                 </c:pt>
                 <c:pt idx="1">
-                  <c:v>122</c:v>
+                  <c:v>123</c:v>
                 </c:pt>
                 <c:pt idx="2">
                   <c:v>60</c:v>
@@ -3705,7 +3705,7 @@
           </a:p>
           <a:p>
             <a:r>
-              <a:t>產出:2026-10-05 19:28(台北時間)</a:t>
+              <a:t>產出:2026-10-05 20:38(台北時間)</a:t>
             </a:r>
           </a:p>
           <a:p>
@@ -3773,7 +3773,7 @@
               <a:defRPr sz="1600"/>
             </a:pPr>
             <a:r>
-              <a:t>本期共蒐集 9143 篇公開報導,可歸類 4532 篇</a:t>
+              <a:t>本期共蒐集 9315 篇公開報導,可歸類 4612 篇</a:t>
             </a:r>
           </a:p>
           <a:p>
@@ -3781,7 +3781,7 @@
               <a:defRPr sz="1600"/>
             </a:pPr>
             <a:r>
-              <a:t>政府教育單位:974 篇(佔可歸類 21.5%)</a:t>
+              <a:t>政府教育單位:985 篇(佔可歸類 21.4%)</a:t>
             </a:r>
           </a:p>
           <a:p>
@@ -3789,7 +3789,7 @@
               <a:defRPr sz="1600"/>
             </a:pPr>
             <a:r>
-              <a:t>高科技製造業:947 篇(佔可歸類 20.9%)</a:t>
+              <a:t>高科技製造業:958 篇(佔可歸類 20.8%)</a:t>
             </a:r>
           </a:p>
           <a:p>
@@ -3797,7 +3797,7 @@
               <a:defRPr sz="1600"/>
             </a:pPr>
             <a:r>
-              <a:t>金融業:716 篇(佔可歸類 15.8%)</a:t>
+              <a:t>金融業:733 篇(佔可歸類 15.9%)</a:t>
             </a:r>
           </a:p>
           <a:p>
@@ -3805,7 +3805,7 @@
               <a:defRPr sz="1600"/>
             </a:pPr>
             <a:r>
-              <a:t>最熱主題:AI 與自動化(971 篇)、利率與資金環境(339 篇)、地緣政治與供應鏈(231 篇)</a:t>
+              <a:t>最熱主題:AI 與自動化(991 篇)、利率與資金環境(344 篇)、地緣政治與供應鏈(237 篇)</a:t>
             </a:r>
           </a:p>
           <a:p>
@@ -3966,7 +3966,7 @@
           <a:lstStyle/>
           <a:p>
             <a:r>
-              <a:t>競品聲量對比(SOV)— 半導體(合計 544 篇)</a:t>
+              <a:t>競品聲量對比(SOV)— 半導體(合計 548 篇)</a:t>
             </a:r>
           </a:p>
         </p:txBody>
